--- a/ppt_tasks/change-design-deck/change-design-deck.pptx
+++ b/ppt_tasks/change-design-deck/change-design-deck.pptx
@@ -3335,7 +3335,7 @@
                 <a:ea typeface="Microsoft YaHei"/>
                 <a:cs typeface="Microsoft YaHei"/>
               </a:rPr>
-              <a:t>Tauri 打包产物</a:t>
+              <a:t>Tauri 外壳（实测）</a:t>
             </a:r>
           </a:p>
         </p:txBody>
@@ -3372,7 +3372,7 @@
                 <a:ea typeface="Microsoft YaHei"/>
                 <a:cs typeface="Microsoft YaHei"/>
               </a:rPr>
-              <a:t>0.06 ms</a:t>
+              <a:t>47 MB</a:t>
             </a:r>
           </a:p>
         </p:txBody>
@@ -3409,7 +3409,7 @@
                 <a:ea typeface="Microsoft YaHei"/>
                 <a:cs typeface="Microsoft YaHei"/>
               </a:rPr>
-              <a:t>3D 拾取耗时</a:t>
+              <a:t>精简 Java 运行时（实测）</a:t>
             </a:r>
           </a:p>
         </p:txBody>
@@ -3446,7 +3446,7 @@
                 <a:ea typeface="Microsoft YaHei"/>
                 <a:cs typeface="Microsoft YaHei"/>
               </a:rPr>
-              <a:t>15</a:t>
+              <a:t>0.06 ms</a:t>
             </a:r>
           </a:p>
         </p:txBody>
@@ -3483,7 +3483,7 @@
                 <a:ea typeface="Microsoft YaHei"/>
                 <a:cs typeface="Microsoft YaHei"/>
               </a:rPr>
-              <a:t>张表的数据模型</a:t>
+              <a:t>3D 拾取耗时（实测）</a:t>
             </a:r>
           </a:p>
         </p:txBody>
@@ -13388,7 +13388,7 @@
                 <a:ea typeface="Microsoft YaHei"/>
                 <a:cs typeface="Microsoft YaHei"/>
               </a:rPr>
-              <a:t>产出 exe</a:t>
+              <a:t>Tauri 外壳</a:t>
             </a:r>
           </a:p>
         </p:txBody>
@@ -13462,7 +13462,7 @@
                 <a:ea typeface="Microsoft YaHei"/>
                 <a:cs typeface="Microsoft YaHei"/>
               </a:rPr>
-              <a:t>Electron 对比</a:t>
+              <a:t>精简 JRE</a:t>
             </a:r>
           </a:p>
         </p:txBody>
@@ -13499,7 +13499,7 @@
                 <a:ea typeface="Microsoft YaHei"/>
                 <a:cs typeface="Microsoft YaHei"/>
               </a:rPr>
-              <a:t>150 MB</a:t>
+              <a:t>47 MB</a:t>
             </a:r>
           </a:p>
         </p:txBody>
@@ -13565,7 +13565,7 @@
                 <a:ea typeface="Microsoft YaHei"/>
                 <a:cs typeface="Microsoft YaHei"/>
               </a:rPr>
-              <a:t>唯一仍需验证：JDK 25 与 Spring Boot 3.x 的版本搭配</a:t>
+              <a:t>完整安装包预计 100–130 MB：外壳 + 自带 JRE + fat jar。仍小于 Electron 的 150 MB 起，但不是数量级差距</a:t>
             </a:r>
           </a:p>
         </p:txBody>
@@ -14283,7 +14283,7 @@
         <p:spPr>
           <a:xfrm>
             <a:off x="685800" y="1920239"/>
-            <a:ext cx="4754880" cy="256032"/>
+            <a:ext cx="4754880" cy="237744"/>
           </a:xfrm>
           <a:prstGeom prst="rect">
             <a:avLst/>
@@ -14320,7 +14320,7 @@
         <p:spPr>
           <a:xfrm>
             <a:off x="5577840" y="1920239"/>
-            <a:ext cx="640080" cy="256032"/>
+            <a:ext cx="640080" cy="237744"/>
           </a:xfrm>
           <a:prstGeom prst="rect">
             <a:avLst/>
@@ -14357,7 +14357,7 @@
         <p:spPr>
           <a:xfrm>
             <a:off x="6355080" y="1920239"/>
-            <a:ext cx="5120640" cy="256032"/>
+            <a:ext cx="5120640" cy="237744"/>
           </a:xfrm>
           <a:prstGeom prst="rect">
             <a:avLst/>
@@ -14393,7 +14393,7 @@
         </p:nvSpPr>
         <p:spPr>
           <a:xfrm>
-            <a:off x="685800" y="2185415"/>
+            <a:off x="685800" y="2148839"/>
             <a:ext cx="10820095" cy="8229"/>
           </a:xfrm>
           <a:prstGeom prst="rect">
@@ -14422,8 +14422,8 @@
         </p:nvSpPr>
         <p:spPr>
           <a:xfrm>
-            <a:off x="685800" y="2304287"/>
-            <a:ext cx="4754880" cy="256032"/>
+            <a:off x="685800" y="2249423"/>
+            <a:ext cx="4754880" cy="237744"/>
           </a:xfrm>
           <a:prstGeom prst="rect">
             <a:avLst/>
@@ -14459,8 +14459,8 @@
         </p:nvSpPr>
         <p:spPr>
           <a:xfrm>
-            <a:off x="5577840" y="2304287"/>
-            <a:ext cx="640080" cy="256032"/>
+            <a:off x="5577840" y="2249423"/>
+            <a:ext cx="640080" cy="237744"/>
           </a:xfrm>
           <a:prstGeom prst="rect">
             <a:avLst/>
@@ -14496,8 +14496,8 @@
         </p:nvSpPr>
         <p:spPr>
           <a:xfrm>
-            <a:off x="6355080" y="2304287"/>
-            <a:ext cx="5120640" cy="256032"/>
+            <a:off x="6355080" y="2249423"/>
+            <a:ext cx="5120640" cy="237744"/>
           </a:xfrm>
           <a:prstGeom prst="rect">
             <a:avLst/>
@@ -14533,7 +14533,7 @@
         </p:nvSpPr>
         <p:spPr>
           <a:xfrm>
-            <a:off x="685800" y="2569463"/>
+            <a:off x="685800" y="2478023"/>
             <a:ext cx="10820095" cy="8229"/>
           </a:xfrm>
           <a:prstGeom prst="rect">
@@ -14562,8 +14562,8 @@
         </p:nvSpPr>
         <p:spPr>
           <a:xfrm>
-            <a:off x="685800" y="2688335"/>
-            <a:ext cx="4754880" cy="256032"/>
+            <a:off x="685800" y="2578607"/>
+            <a:ext cx="4754880" cy="237744"/>
           </a:xfrm>
           <a:prstGeom prst="rect">
             <a:avLst/>
@@ -14599,8 +14599,8 @@
         </p:nvSpPr>
         <p:spPr>
           <a:xfrm>
-            <a:off x="5577840" y="2688335"/>
-            <a:ext cx="640080" cy="256032"/>
+            <a:off x="5577840" y="2578607"/>
+            <a:ext cx="640080" cy="237744"/>
           </a:xfrm>
           <a:prstGeom prst="rect">
             <a:avLst/>
@@ -14636,8 +14636,8 @@
         </p:nvSpPr>
         <p:spPr>
           <a:xfrm>
-            <a:off x="6355080" y="2688335"/>
-            <a:ext cx="5120640" cy="256032"/>
+            <a:off x="6355080" y="2578607"/>
+            <a:ext cx="5120640" cy="237744"/>
           </a:xfrm>
           <a:prstGeom prst="rect">
             <a:avLst/>
@@ -14673,7 +14673,7 @@
         </p:nvSpPr>
         <p:spPr>
           <a:xfrm>
-            <a:off x="685800" y="2953511"/>
+            <a:off x="685800" y="2807207"/>
             <a:ext cx="10820095" cy="8229"/>
           </a:xfrm>
           <a:prstGeom prst="rect">
@@ -14702,8 +14702,8 @@
         </p:nvSpPr>
         <p:spPr>
           <a:xfrm>
-            <a:off x="685800" y="3072383"/>
-            <a:ext cx="4754880" cy="256032"/>
+            <a:off x="685800" y="2907791"/>
+            <a:ext cx="4754880" cy="237744"/>
           </a:xfrm>
           <a:prstGeom prst="rect">
             <a:avLst/>
@@ -14739,8 +14739,8 @@
         </p:nvSpPr>
         <p:spPr>
           <a:xfrm>
-            <a:off x="5577840" y="3072383"/>
-            <a:ext cx="640080" cy="256032"/>
+            <a:off x="5577840" y="2907791"/>
+            <a:ext cx="640080" cy="237744"/>
           </a:xfrm>
           <a:prstGeom prst="rect">
             <a:avLst/>
@@ -14776,8 +14776,8 @@
         </p:nvSpPr>
         <p:spPr>
           <a:xfrm>
-            <a:off x="6355080" y="3072383"/>
-            <a:ext cx="5120640" cy="256032"/>
+            <a:off x="6355080" y="2907791"/>
+            <a:ext cx="5120640" cy="237744"/>
           </a:xfrm>
           <a:prstGeom prst="rect">
             <a:avLst/>
@@ -14813,7 +14813,7 @@
         </p:nvSpPr>
         <p:spPr>
           <a:xfrm>
-            <a:off x="685800" y="3337559"/>
+            <a:off x="685800" y="3136391"/>
             <a:ext cx="10820095" cy="8229"/>
           </a:xfrm>
           <a:prstGeom prst="rect">
@@ -14842,8 +14842,8 @@
         </p:nvSpPr>
         <p:spPr>
           <a:xfrm>
-            <a:off x="685800" y="3456431"/>
-            <a:ext cx="4754880" cy="256032"/>
+            <a:off x="685800" y="3236975"/>
+            <a:ext cx="4754880" cy="237744"/>
           </a:xfrm>
           <a:prstGeom prst="rect">
             <a:avLst/>
@@ -14866,7 +14866,7 @@
                 <a:ea typeface="Microsoft YaHei"/>
                 <a:cs typeface="Microsoft YaHei"/>
               </a:rPr>
-              <a:t>Redis 在虚拟机上，常关</a:t>
+              <a:t>朋友的电脑没有 JDK</a:t>
             </a:r>
           </a:p>
         </p:txBody>
@@ -14879,8 +14879,8 @@
         </p:nvSpPr>
         <p:spPr>
           <a:xfrm>
-            <a:off x="5577840" y="3456431"/>
-            <a:ext cx="640080" cy="256032"/>
+            <a:off x="5577840" y="3236975"/>
+            <a:ext cx="640080" cy="237744"/>
           </a:xfrm>
           <a:prstGeom prst="rect">
             <a:avLst/>
@@ -14916,8 +14916,8 @@
         </p:nvSpPr>
         <p:spPr>
           <a:xfrm>
-            <a:off x="6355080" y="3456431"/>
-            <a:ext cx="5120640" cy="256032"/>
+            <a:off x="6355080" y="3236975"/>
+            <a:ext cx="5120640" cy="237744"/>
           </a:xfrm>
           <a:prstGeom prst="rect">
             <a:avLst/>
@@ -14940,7 +14940,7 @@
                 <a:ea typeface="Microsoft YaHei"/>
                 <a:cs typeface="Microsoft YaHei"/>
               </a:rPr>
-              <a:t>无缓存是常态路径；超时压到 300 ms</a:t>
+              <a:t>自带 47 MB 精简 JRE；首次启动向导配数据目录与模型 key</a:t>
             </a:r>
           </a:p>
         </p:txBody>
@@ -14953,7 +14953,7 @@
         </p:nvSpPr>
         <p:spPr>
           <a:xfrm>
-            <a:off x="685800" y="3721607"/>
+            <a:off x="685800" y="3465575"/>
             <a:ext cx="10820095" cy="8229"/>
           </a:xfrm>
           <a:prstGeom prst="rect">
@@ -14982,8 +14982,8 @@
         </p:nvSpPr>
         <p:spPr>
           <a:xfrm>
-            <a:off x="685800" y="3840479"/>
-            <a:ext cx="4754880" cy="256032"/>
+            <a:off x="685800" y="3566159"/>
+            <a:ext cx="4754880" cy="237744"/>
           </a:xfrm>
           <a:prstGeom prst="rect">
             <a:avLst/>
@@ -15006,7 +15006,7 @@
                 <a:ea typeface="Microsoft YaHei"/>
                 <a:cs typeface="Microsoft YaHei"/>
               </a:rPr>
-              <a:t>CC BY-SA 的 ShareAlike 传染性</a:t>
+              <a:t>Redis 在虚拟机上，常关</a:t>
             </a:r>
           </a:p>
         </p:txBody>
@@ -15019,8 +15019,8 @@
         </p:nvSpPr>
         <p:spPr>
           <a:xfrm>
-            <a:off x="5577840" y="3840479"/>
-            <a:ext cx="640080" cy="256032"/>
+            <a:off x="5577840" y="3566159"/>
+            <a:ext cx="640080" cy="237744"/>
           </a:xfrm>
           <a:prstGeom prst="rect">
             <a:avLst/>
@@ -15056,8 +15056,8 @@
         </p:nvSpPr>
         <p:spPr>
           <a:xfrm>
-            <a:off x="6355080" y="3840479"/>
-            <a:ext cx="5120640" cy="256032"/>
+            <a:off x="6355080" y="3566159"/>
+            <a:ext cx="5120640" cy="237744"/>
           </a:xfrm>
           <a:prstGeom prst="rect">
             <a:avLst/>
@@ -15080,7 +15080,7 @@
                 <a:ea typeface="Microsoft YaHei"/>
                 <a:cs typeface="Microsoft YaHei"/>
               </a:rPr>
-              <a:t>自用无碍；分发受限；界面必须署名</a:t>
+              <a:t>无缓存是常态路径；超时压到 300 ms</a:t>
             </a:r>
           </a:p>
         </p:txBody>
@@ -15093,7 +15093,7 @@
         </p:nvSpPr>
         <p:spPr>
           <a:xfrm>
-            <a:off x="685800" y="4105655"/>
+            <a:off x="685800" y="3794759"/>
             <a:ext cx="10820095" cy="8229"/>
           </a:xfrm>
           <a:prstGeom prst="rect">
@@ -15122,6 +15122,146 @@
         </p:nvSpPr>
         <p:spPr>
           <a:xfrm>
+            <a:off x="685800" y="3895343"/>
+            <a:ext cx="4754880" cy="237744"/>
+          </a:xfrm>
+          <a:prstGeom prst="rect">
+            <a:avLst/>
+          </a:prstGeom>
+          <a:noFill/>
+        </p:spPr>
+        <p:txBody>
+          <a:bodyPr wrap="square">
+            <a:spAutoFit/>
+          </a:bodyPr>
+          <a:lstStyle/>
+          <a:p>
+            <a:pPr algn="l"/>
+            <a:r>
+              <a:rPr sz="1150" b="0">
+                <a:solidFill>
+                  <a:srgbClr val="ECEEF1"/>
+                </a:solidFill>
+                <a:latin typeface="Microsoft YaHei"/>
+                <a:ea typeface="Microsoft YaHei"/>
+                <a:cs typeface="Microsoft YaHei"/>
+              </a:rPr>
+              <a:t>CC BY-SA 的 ShareAlike 传染性</a:t>
+            </a:r>
+          </a:p>
+        </p:txBody>
+      </p:sp>
+      <p:sp>
+        <p:nvSpPr>
+          <p:cNvPr id="34" name="TextBox 33"/>
+          <p:cNvSpPr txBox="1"/>
+          <p:nvPr/>
+        </p:nvSpPr>
+        <p:spPr>
+          <a:xfrm>
+            <a:off x="5577840" y="3895343"/>
+            <a:ext cx="640080" cy="237744"/>
+          </a:xfrm>
+          <a:prstGeom prst="rect">
+            <a:avLst/>
+          </a:prstGeom>
+          <a:noFill/>
+        </p:spPr>
+        <p:txBody>
+          <a:bodyPr wrap="square">
+            <a:spAutoFit/>
+          </a:bodyPr>
+          <a:lstStyle/>
+          <a:p>
+            <a:pPr algn="l"/>
+            <a:r>
+              <a:rPr sz="1150" b="1">
+                <a:solidFill>
+                  <a:srgbClr val="8B939D"/>
+                </a:solidFill>
+                <a:latin typeface="Microsoft YaHei"/>
+                <a:ea typeface="Microsoft YaHei"/>
+                <a:cs typeface="Microsoft YaHei"/>
+              </a:rPr>
+              <a:t>中</a:t>
+            </a:r>
+          </a:p>
+        </p:txBody>
+      </p:sp>
+      <p:sp>
+        <p:nvSpPr>
+          <p:cNvPr id="35" name="TextBox 34"/>
+          <p:cNvSpPr txBox="1"/>
+          <p:nvPr/>
+        </p:nvSpPr>
+        <p:spPr>
+          <a:xfrm>
+            <a:off x="6355080" y="3895343"/>
+            <a:ext cx="5120640" cy="237744"/>
+          </a:xfrm>
+          <a:prstGeom prst="rect">
+            <a:avLst/>
+          </a:prstGeom>
+          <a:noFill/>
+        </p:spPr>
+        <p:txBody>
+          <a:bodyPr wrap="square">
+            <a:spAutoFit/>
+          </a:bodyPr>
+          <a:lstStyle/>
+          <a:p>
+            <a:pPr algn="l"/>
+            <a:r>
+              <a:rPr sz="1100" b="0">
+                <a:solidFill>
+                  <a:srgbClr val="6B7480"/>
+                </a:solidFill>
+                <a:latin typeface="Microsoft YaHei"/>
+                <a:ea typeface="Microsoft YaHei"/>
+                <a:cs typeface="Microsoft YaHei"/>
+              </a:rPr>
+              <a:t>自用无碍；一旦分发则整体须 CC BY-SA</a:t>
+            </a:r>
+          </a:p>
+        </p:txBody>
+      </p:sp>
+      <p:sp>
+        <p:nvSpPr>
+          <p:cNvPr id="36" name="Rectangle 35"/>
+          <p:cNvSpPr/>
+          <p:nvPr/>
+        </p:nvSpPr>
+        <p:spPr>
+          <a:xfrm>
+            <a:off x="685800" y="4123943"/>
+            <a:ext cx="10820095" cy="8229"/>
+          </a:xfrm>
+          <a:prstGeom prst="rect">
+            <a:avLst/>
+          </a:prstGeom>
+          <a:solidFill>
+            <a:srgbClr val="262B31"/>
+          </a:solidFill>
+          <a:ln>
+            <a:noFill/>
+          </a:ln>
+        </p:spPr>
+        <p:txBody>
+          <a:bodyPr rtlCol="0" anchor="ctr"/>
+          <a:lstStyle/>
+          <a:p>
+            <a:pPr algn="ctr"/>
+          </a:p>
+        </p:txBody>
+      </p:sp>
+      <p:sp>
+        <p:nvSpPr>
+          <p:cNvPr id="37" name="TextBox 36"/>
+          <p:cNvSpPr txBox="1"/>
+          <p:nvPr/>
+        </p:nvSpPr>
+        <p:spPr>
+          <a:xfrm>
             <a:off x="685800" y="4315967"/>
             <a:ext cx="5486400" cy="237744"/>
           </a:xfrm>
@@ -15153,7 +15293,7 @@
       </p:sp>
       <p:sp>
         <p:nvSpPr>
-          <p:cNvPr id="34" name="Rounded Rectangle 33"/>
+          <p:cNvPr id="38" name="Rounded Rectangle 37"/>
           <p:cNvSpPr/>
           <p:nvPr/>
         </p:nvSpPr>
@@ -15184,7 +15324,7 @@
       </p:sp>
       <p:sp>
         <p:nvSpPr>
-          <p:cNvPr id="35" name="Rectangle 34"/>
+          <p:cNvPr id="39" name="Rectangle 38"/>
           <p:cNvSpPr/>
           <p:nvPr/>
         </p:nvSpPr>
@@ -15213,7 +15353,7 @@
       </p:sp>
       <p:sp>
         <p:nvSpPr>
-          <p:cNvPr id="36" name="TextBox 35"/>
+          <p:cNvPr id="40" name="TextBox 39"/>
           <p:cNvSpPr txBox="1"/>
           <p:nvPr/>
         </p:nvSpPr>
@@ -15250,7 +15390,7 @@
       </p:sp>
       <p:sp>
         <p:nvSpPr>
-          <p:cNvPr id="37" name="TextBox 36"/>
+          <p:cNvPr id="41" name="TextBox 40"/>
           <p:cNvSpPr txBox="1"/>
           <p:nvPr/>
         </p:nvSpPr>
@@ -15280,14 +15420,14 @@
                 <a:ea typeface="Microsoft YaHei"/>
                 <a:cs typeface="Microsoft YaHei"/>
               </a:rPr>
-              <a:t>最小骨架 → 数据层 → 动作库 → 训练 → 饮食 → 智能体 → 身体数据 → 人体图 2D → Redis 缓存 → 打包</a:t>
-            </a:r>
-          </a:p>
-        </p:txBody>
-      </p:sp>
-      <p:sp>
-        <p:nvSpPr>
-          <p:cNvPr id="38" name="TextBox 37"/>
+              <a:t>最小骨架 → 数据层 → 动作库 → 训练 → 饮食 → 智能体 → 身体数据 → 人体图 2D → Redis 缓存 → 打包分发（自带 JRE）</a:t>
+            </a:r>
+          </a:p>
+        </p:txBody>
+      </p:sp>
+      <p:sp>
+        <p:nvSpPr>
+          <p:cNvPr id="42" name="TextBox 41"/>
           <p:cNvSpPr txBox="1"/>
           <p:nvPr/>
         </p:nvSpPr>
@@ -15317,14 +15457,14 @@
                 <a:ea typeface="Microsoft YaHei"/>
                 <a:cs typeface="Microsoft YaHei"/>
               </a:rPr>
-              <a:t>做完就有个能天天用的东西</a:t>
-            </a:r>
-          </a:p>
-        </p:txBody>
-      </p:sp>
-      <p:sp>
-        <p:nvSpPr>
-          <p:cNvPr id="39" name="Rounded Rectangle 38"/>
+              <a:t>能天天用，也能发给朋友</a:t>
+            </a:r>
+          </a:p>
+        </p:txBody>
+      </p:sp>
+      <p:sp>
+        <p:nvSpPr>
+          <p:cNvPr id="43" name="Rounded Rectangle 42"/>
           <p:cNvSpPr/>
           <p:nvPr/>
         </p:nvSpPr>
@@ -15355,7 +15495,7 @@
       </p:sp>
       <p:sp>
         <p:nvSpPr>
-          <p:cNvPr id="40" name="Rectangle 39"/>
+          <p:cNvPr id="44" name="Rectangle 43"/>
           <p:cNvSpPr/>
           <p:nvPr/>
         </p:nvSpPr>
@@ -15384,7 +15524,7 @@
       </p:sp>
       <p:sp>
         <p:nvSpPr>
-          <p:cNvPr id="41" name="TextBox 40"/>
+          <p:cNvPr id="45" name="TextBox 44"/>
           <p:cNvSpPr txBox="1"/>
           <p:nvPr/>
         </p:nvSpPr>
@@ -15421,7 +15561,7 @@
       </p:sp>
       <p:sp>
         <p:nvSpPr>
-          <p:cNvPr id="42" name="TextBox 41"/>
+          <p:cNvPr id="46" name="TextBox 45"/>
           <p:cNvSpPr txBox="1"/>
           <p:nvPr/>
         </p:nvSpPr>
@@ -15458,7 +15598,7 @@
       </p:sp>
       <p:sp>
         <p:nvSpPr>
-          <p:cNvPr id="43" name="TextBox 42"/>
+          <p:cNvPr id="47" name="TextBox 46"/>
           <p:cNvSpPr txBox="1"/>
           <p:nvPr/>
         </p:nvSpPr>
